--- a/song-projects/10-chalamti/10-chalamti.pptx
+++ b/song-projects/10-chalamti/10-chalamti.pptx
@@ -4645,7 +4645,7 @@
                 <a:latin typeface="Assistant Light"/>
                 <a:cs typeface="Assistant Light"/>
               </a:rPr>
-              <a:t>מילים: דורון טלמון · לחן: דורון טלמון ומתן גלעד · יצא ב-12 במרץ 2026</a:t>
+              <a:t>מילים: דורון טלמון · לחן: מתי גלעד ודורון טלמון · יצא ב-12 במרץ 2026</a:t>
             </a:r>
             <a:endParaRPr lang="he-IL" sz="1400"/>
           </a:p>
